--- a/docs/Assay_Presentation.pptx
+++ b/docs/Assay_Presentation.pptx
@@ -5849,7 +5849,7 @@
                   </a:extLst>
                 </a:hlinkClick>
               </a:rPr>
-              <a:t>assay-manager-7474649367590010.aws.databricksapps.com</a:t>
+              <a:t>assay-manager-7474654480147366.aws.databricksapps.com</a:t>
             </a:r>
             <a:endParaRPr lang="en-US" sz="1900" dirty="0"/>
           </a:p>
